--- a/docs/EIGENNEXUS_CxO_Deck.pptx
+++ b/docs/EIGENNEXUS_CxO_Deck.pptx
@@ -10025,7 +10025,7 @@
                 </a:solidFill>
                 <a:latin typeface="Calibri"/>
               </a:rPr>
-              <a:t>Audit-as-a-Service — vendor-neutral QPU qualification</a:t>
+              <a:t>Audit-as-a-Service — the pre-registered 'can this QPU run my workload?' exam</a:t>
             </a:r>
           </a:p>
         </p:txBody>
@@ -10155,7 +10155,7 @@
                 </a:solidFill>
                 <a:latin typeface="Calibri"/>
               </a:rPr>
-              <a:t>The rigged-to-be-honest exam for a client's own workload:</a:t>
+              <a:t>The wedge — answered with receipts: does a given QPU retain signal on a client's OWN circuit, before they commit budget?</a:t>
             </a:r>
           </a:p>
           <a:p>
@@ -10212,7 +10212,7 @@
                 </a:solidFill>
                 <a:latin typeface="Calibri"/>
               </a:rPr>
-              <a:t>• a report that says what each QPU can and cannot do — with receipts</a:t>
+              <a:t>• a report of what each QPU can and cannot do — every number re-derivable from raw data</a:t>
             </a:r>
           </a:p>
           <a:p>
@@ -10231,7 +10231,7 @@
                 </a:solidFill>
                 <a:latin typeface="Calibri"/>
               </a:rPr>
-              <a:t>• every number re-derivable from raw data; spend audited to the credit</a:t>
+              <a:t>• proof it works: our own program qualified 4 configs signal-bearing, 2 scrambled — on the SAME circuit; a ~$70 single-device test that pre-empts a six-figure wrong build</a:t>
             </a:r>
           </a:p>
         </p:txBody>
@@ -10544,7 +10544,7 @@
                 </a:solidFill>
                 <a:latin typeface="Calibri"/>
               </a:rPr>
-              <a:t>TARGET DESIGN PARTNERS</a:t>
+              <a:t>WHO BUYS FIRST</a:t>
             </a:r>
           </a:p>
         </p:txBody>
@@ -10580,13 +10580,13 @@
               </a:spcAft>
             </a:pPr>
             <a:r>
-              <a:rPr sz="1150" b="0">
+              <a:rPr sz="1150" b="1">
                 <a:solidFill>
                   <a:srgbClr val="A9B4C8"/>
                 </a:solidFill>
                 <a:latin typeface="Calibri"/>
               </a:rPr>
-              <a:t>Buy-side risk / quant desks vetting QPU vendor claims</a:t>
+              <a:t>BEACHHEAD — a buy-side risk / quant desk</a:t>
             </a:r>
           </a:p>
           <a:p>
@@ -10599,13 +10599,13 @@
               </a:spcAft>
             </a:pPr>
             <a:r>
-              <a:rPr sz="1150" b="0">
+              <a:rPr sz="1100" b="0">
                 <a:solidFill>
                   <a:srgbClr val="A9B4C8"/>
                 </a:solidFill>
                 <a:latin typeface="Calibri"/>
               </a:rPr>
-              <a:t>Quantum hardware vendors needing independent benchmarks</a:t>
+              <a:t>about to fund a quantum pilot: we tell them which device (if any) survives THEIR circuit — before they build.</a:t>
             </a:r>
           </a:p>
           <a:p>
@@ -10618,13 +10618,13 @@
               </a:spcAft>
             </a:pPr>
             <a:r>
-              <a:rPr sz="1150" b="0">
+              <a:rPr sz="1150" b="1">
                 <a:solidFill>
                   <a:srgbClr val="A9B4C8"/>
                 </a:solidFill>
                 <a:latin typeface="Calibri"/>
               </a:rPr>
-              <a:t>CTO / innovation offices doing quantum-readiness diligence</a:t>
+              <a:t>EXPANSION</a:t>
             </a:r>
           </a:p>
           <a:p>
@@ -10637,13 +10637,13 @@
               </a:spcAft>
             </a:pPr>
             <a:r>
-              <a:rPr sz="1150" b="0">
+              <a:rPr sz="1100" b="0">
                 <a:solidFill>
                   <a:srgbClr val="A9B4C8"/>
                 </a:solidFill>
                 <a:latin typeface="Calibri"/>
               </a:rPr>
-              <a:t>Public-sector evaluation programs (assurance-grade)</a:t>
+              <a:t>Hardware vendors (independent benchmarks) · CTO quantum-readiness diligence · public-sector assurance.</a:t>
             </a:r>
           </a:p>
         </p:txBody>

--- a/docs/EIGENNEXUS_CxO_Deck.pptx
+++ b/docs/EIGENNEXUS_CxO_Deck.pptx
@@ -3972,7 +3972,7 @@
                 </a:solidFill>
                 <a:latin typeface="Calibri"/>
               </a:rPr>
-              <a:t>9.7–24σ</a:t>
+              <a:t>9.7–23.9σ</a:t>
             </a:r>
           </a:p>
         </p:txBody>
@@ -5408,7 +5408,7 @@
                 <a:latin typeface="Calibri"/>
               </a:rPr>
               <a:t>Garnet n=8
-(3 runs)</a:t>
+seed-0 (4 runs)</a:t>
             </a:r>
           </a:p>
         </p:txBody>
@@ -5965,7 +5965,7 @@
                 </a:solidFill>
                 <a:latin typeface="Calibri"/>
               </a:rPr>
-              <a:t>Bars: raw feature error vs the exact simulation (4,000 shots; IonQ 500). Below the white tick, the device retains the circuit's signal; above it, the output is statistically indistinguishable from a fully scrambled state. Every verdict sits 9.7–24σ from its tick.</a:t>
+              <a:t>Bars: raw feature error vs the exact simulation (4,000 shots; IonQ 500). Below the white tick, the device retains the circuit's signal; above it, the output is statistically indistinguishable from a fully scrambled state. Every verdict sits 9.7–23.9σ from its tick.</a:t>
             </a:r>
           </a:p>
         </p:txBody>
@@ -6762,7 +6762,7 @@
                 </a:solidFill>
                 <a:latin typeface="Calibri"/>
               </a:rPr>
-              <a:t>S1 refuted · S2 refuted · S3b refuted high · S4 held</a:t>
+              <a:t>S1 · S2 · S3b refuted · S7 cross-seed refuted · S4 held</a:t>
             </a:r>
             <a:r>
               <a:rPr sz="1250" b="0">
@@ -6771,7 +6771,7 @@
                 </a:solidFill>
                 <a:latin typeface="Calibri"/>
               </a:rPr>
-              <a:t> — three of four falsified by our own controlled measurements, committed first, reported as measured.</a:t>
+              <a:t> — four of our own pre-registered predictions falsified by controlled measurement, committed first, reported as measured.</a:t>
             </a:r>
           </a:p>
         </p:txBody>
@@ -8779,7 +8779,7 @@
                 </a:solidFill>
                 <a:latin typeface="Calibri"/>
               </a:rPr>
-              <a:t>Bootstrap from committed raw counts reproduces every published number and quantifies every claim (9.7–24σ).</a:t>
+              <a:t>Bootstrap from committed raw counts reproduces every published number and quantifies every claim (9.7–23.9σ).</a:t>
             </a:r>
           </a:p>
         </p:txBody>
@@ -9413,7 +9413,7 @@
                 </a:solidFill>
                 <a:latin typeface="Courier New"/>
               </a:rPr>
-              <a:t>S7</a:t>
+              <a:t>S7 ✓</a:t>
             </a:r>
           </a:p>
         </p:txBody>
@@ -9455,7 +9455,7 @@
                 </a:solidFill>
                 <a:latin typeface="Calibri"/>
               </a:rPr>
-              <a:t>Mechanism isolation: same instance, permuted embedding, one session — embedding vs instance, falsifiable both ways.</a:t>
+              <a:t>EXECUTED (cross-seed control): an independent seed-1 n=8 instance is signal-bearing while seed-0 scrambles — refutes a size law (in the paper). The embedding arm (H-EMBED) remains pre-registered for future work.</a:t>
             </a:r>
           </a:p>
         </p:txBody>

--- a/docs/EIGENNEXUS_CxO_Deck.pptx
+++ b/docs/EIGENNEXUS_CxO_Deck.pptx
@@ -3498,7 +3498,7 @@
                 </a:solidFill>
                 <a:latin typeface="Calibri"/>
               </a:rPr>
-              <a:t>THE THREE SENTENCES THAT MATTER</a:t>
+              <a:t>THE INSTRUMENT FIRST, THEN THE VERDICT</a:t>
             </a:r>
           </a:p>
         </p:txBody>
@@ -3540,7 +3540,7 @@
                 </a:solidFill>
                 <a:latin typeface="Calibri"/>
               </a:rPr>
-              <a:t>What we found — and can prove</a:t>
+              <a:t>What we built — and what it proves</a:t>
             </a:r>
           </a:p>
         </p:txBody>
@@ -3624,11 +3624,11 @@
             <a:r>
               <a:rPr sz="4000" b="1">
                 <a:solidFill>
-                  <a:srgbClr val="57C88B"/>
-                </a:solidFill>
-                <a:latin typeface="Calibri"/>
-              </a:rPr>
-              <a:t>$0</a:t>
+                  <a:srgbClr val="4FD8EA"/>
+                </a:solidFill>
+                <a:latin typeface="Calibri"/>
+              </a:rPr>
+              <a:t>1 command</a:t>
             </a:r>
           </a:p>
         </p:txBody>
@@ -3670,7 +3670,7 @@
                 </a:solidFill>
                 <a:latin typeface="Calibri"/>
               </a:rPr>
-              <a:t>for quantum volatility forecasting today</a:t>
+              <a:t>reproduces the entire audit — offline, no credits</a:t>
             </a:r>
           </a:p>
         </p:txBody>
@@ -3712,7 +3712,7 @@
                 </a:solidFill>
                 <a:latin typeface="Calibri"/>
               </a:rPr>
-              <a:t>Across every fair, pre-registered test, a plain classical formula (HAR-X) still wins. Parity at best, never advantage — the avoided-cost result your risk committee needs in writing.</a:t>
+              <a:t>A pre-registered instrument: engine tests + hardware bootstrap + noise fingerprint, re-run in ~2 minutes with the network cut. Every hardware prediction was hash-committed to a prior commit before the data existed. This machine — not any single number — is the durable asset.</a:t>
             </a:r>
           </a:p>
         </p:txBody>
@@ -3796,7 +3796,7 @@
             <a:r>
               <a:rPr sz="4000" b="1">
                 <a:solidFill>
-                  <a:srgbClr val="4FD8EA"/>
+                  <a:srgbClr val="57C88B"/>
                 </a:solidFill>
                 <a:latin typeface="Calibri"/>
               </a:rPr>
@@ -3884,7 +3884,7 @@
                 </a:solidFill>
                 <a:latin typeface="Calibri"/>
               </a:rPr>
-              <a:t>Trapped-ion (IonQ) and two superconducting chips (IQM Garnet at n=10/12, IQM Emerald) executed our reservoir with signal intact — refuting our own pre-registered predictions, under controls.</a:t>
+              <a:t>Trapped-ion (IonQ) and two superconducting chips (IQM Garnet at n=10/12, IQM Emerald) executed our reservoir with signal intact — each verdict 9.7–23.9σ beyond shot noise, refuting our own pre-registered predictions under controls. Billing audited to the half-credit across ≈64k credits.</a:t>
             </a:r>
           </a:p>
         </p:txBody>
@@ -3972,7 +3972,7 @@
                 </a:solidFill>
                 <a:latin typeface="Calibri"/>
               </a:rPr>
-              <a:t>9.7–23.9σ</a:t>
+              <a:t>$0</a:t>
             </a:r>
           </a:p>
         </p:txBody>
@@ -4014,7 +4014,7 @@
                 </a:solidFill>
                 <a:latin typeface="Calibri"/>
               </a:rPr>
-              <a:t>margin on every hardware regime claim</a:t>
+              <a:t>of quantum advantage for vol-forecasting today — proven</a:t>
             </a:r>
           </a:p>
         </p:txBody>
@@ -4056,7 +4056,7 @@
                 </a:solidFill>
                 <a:latin typeface="Calibri"/>
               </a:rPr>
-              <a:t>Bootstrap re-analysis of the committed raw counts re-derives every number and puts each verdict far beyond shot noise. Billing audited to the half-credit across ≈64k credits.</a:t>
+              <a:t>Across every fair, pre-registered test a plain classical formula (HAR-X) still wins: parity at best, never advantage — the avoided-cost result your risk committee needs in writing, with receipts.</a:t>
             </a:r>
           </a:p>
         </p:txBody>

--- a/docs/EIGENNEXUS_CxO_Deck.pptx
+++ b/docs/EIGENNEXUS_CxO_Deck.pptx
@@ -10025,7 +10025,7 @@
                 </a:solidFill>
                 <a:latin typeface="Calibri"/>
               </a:rPr>
-              <a:t>Audit-as-a-Service — the pre-registered 'can this QPU run my workload?' exam</a:t>
+              <a:t>We sell trust in a quantum yes/no — proven by an instrument that falsifies itself</a:t>
             </a:r>
           </a:p>
         </p:txBody>
@@ -10155,7 +10155,7 @@
                 </a:solidFill>
                 <a:latin typeface="Calibri"/>
               </a:rPr>
-              <a:t>The wedge — answered with receipts: does a given QPU retain signal on a client's OWN circuit, before they commit budget?</a:t>
+              <a:t>What the client buys is a trustworthy yes/no: does a given QPU retain signal on their OWN circuit, before they commit budget? — credible because the same instrument publishes negatives about itself.</a:t>
             </a:r>
           </a:p>
           <a:p>

--- a/docs/EIGENNEXUS_CxO_Deck.pptx
+++ b/docs/EIGENNEXUS_CxO_Deck.pptx
@@ -3333,7 +3333,7 @@
                 </a:solidFill>
                 <a:latin typeface="Calibri"/>
               </a:rPr>
-              <a:t>Ten QPU campaigns · three vendors · four devices · every claim controlled.</a:t>
+              <a:t>13 QPU campaigns · three vendors · four devices · every claim controlled.</a:t>
             </a:r>
           </a:p>
         </p:txBody>
@@ -3884,7 +3884,7 @@
                 </a:solidFill>
                 <a:latin typeface="Calibri"/>
               </a:rPr>
-              <a:t>Trapped-ion (IonQ) and two superconducting chips (IQM Garnet at n=10/12, IQM Emerald) executed our reservoir with signal intact — each verdict 9.7–23.9σ beyond shot noise, refuting our own pre-registered predictions under controls. Billing audited to the half-credit across ≈64k credits.</a:t>
+              <a:t>Trapped-ion (IonQ) and two superconducting chips (IQM Garnet at n=10/12, IQM Emerald) executed our reservoir with signal intact — each bootstrapped verdict 9.7–23.9σ beyond shot noise, refuting our own pre-registered predictions under controls. Billing audited to the half-credit across ≈64k credits.</a:t>
             </a:r>
           </a:p>
         </p:txBody>
@@ -4014,7 +4014,7 @@
                 </a:solidFill>
                 <a:latin typeface="Calibri"/>
               </a:rPr>
-              <a:t>of quantum advantage for vol-forecasting today — proven</a:t>
+              <a:t>of measured quantum advantage for vol-forecasting today</a:t>
             </a:r>
           </a:p>
         </p:txBody>
@@ -4056,7 +4056,7 @@
                 </a:solidFill>
                 <a:latin typeface="Calibri"/>
               </a:rPr>
-              <a:t>Across every fair, pre-registered test a plain classical formula (HAR-X) still wins: parity at best, never advantage — the avoided-cost result your risk committee needs in writing, with receipts.</a:t>
+              <a:t>Across every fair, pre-registered test: parity at best, never advantage. After Holm nothing is significant either way and the 95% Model Confidence Set retains all models — a statistical tie, with the simplest classical model (HAR-X) the rational choice. The avoided-cost result, with receipts.</a:t>
             </a:r>
           </a:p>
         </p:txBody>
@@ -4286,7 +4286,7 @@
                 </a:solidFill>
                 <a:latin typeface="Calibri"/>
               </a:rPr>
-              <a:t>TEN CAMPAIGNS, ONE PICTURE</a:t>
+              <a:t>FOUR DEVICES, THREE VENDORS, ONE PICTURE</a:t>
             </a:r>
           </a:p>
         </p:txBody>
@@ -4501,7 +4501,7 @@
                 <a:latin typeface="Calibri"/>
               </a:rPr>
               <a:t>IonQ Forte-1
-n=8</a:t>
+n=8 · ion</a:t>
             </a:r>
           </a:p>
         </p:txBody>
@@ -4543,7 +4543,7 @@
                 </a:solidFill>
                 <a:latin typeface="Calibri"/>
               </a:rPr>
-              <a:t>ion, 500 shots</a:t>
+              <a:t>500 shots</a:t>
             </a:r>
           </a:p>
         </p:txBody>
@@ -4556,8 +4556,8 @@
         </p:nvSpPr>
         <p:spPr>
           <a:xfrm>
-            <a:off x="2459736" y="3465249"/>
-            <a:ext cx="1188720" cy="1609670"/>
+            <a:off x="2459736" y="3364012"/>
+            <a:ext cx="1188720" cy="1710907"/>
           </a:xfrm>
           <a:prstGeom prst="rect">
             <a:avLst/>
@@ -4600,7 +4600,7 @@
         </p:nvSpPr>
         <p:spPr>
           <a:xfrm>
-            <a:off x="2395728" y="3251802"/>
+            <a:off x="2395728" y="3079699"/>
             <a:ext cx="1316736" cy="21945"/>
           </a:xfrm>
           <a:prstGeom prst="rect">
@@ -4644,7 +4644,7 @@
         </p:nvSpPr>
         <p:spPr>
           <a:xfrm>
-            <a:off x="2368296" y="3154353"/>
+            <a:off x="2368296" y="3053116"/>
             <a:ext cx="1371600" cy="274320"/>
           </a:xfrm>
           <a:prstGeom prst="rect">
@@ -4673,7 +4673,7 @@
                 </a:solidFill>
                 <a:latin typeface="Calibri"/>
               </a:rPr>
-              <a:t>0.159</a:t>
+              <a:t>0.169</a:t>
             </a:r>
           </a:p>
         </p:txBody>
@@ -4715,8 +4715,8 @@
                 </a:solidFill>
                 <a:latin typeface="Calibri"/>
               </a:rPr>
-              <a:t>Garnet
-n=10</a:t>
+              <a:t>IQM Emerald
+n=8 · new gen</a:t>
             </a:r>
           </a:p>
         </p:txBody>
@@ -4729,8 +4729,8 @@
         </p:nvSpPr>
         <p:spPr>
           <a:xfrm>
-            <a:off x="3959352" y="3364012"/>
-            <a:ext cx="1188720" cy="1710907"/>
+            <a:off x="3959352" y="3465249"/>
+            <a:ext cx="1188720" cy="1609670"/>
           </a:xfrm>
           <a:prstGeom prst="rect">
             <a:avLst/>
@@ -4773,7 +4773,7 @@
         </p:nvSpPr>
         <p:spPr>
           <a:xfrm>
-            <a:off x="3895344" y="3079699"/>
+            <a:off x="3895344" y="3251802"/>
             <a:ext cx="1316736" cy="21945"/>
           </a:xfrm>
           <a:prstGeom prst="rect">
@@ -4817,7 +4817,7 @@
         </p:nvSpPr>
         <p:spPr>
           <a:xfrm>
-            <a:off x="3867912" y="3053116"/>
+            <a:off x="3867912" y="3154353"/>
             <a:ext cx="1371600" cy="274320"/>
           </a:xfrm>
           <a:prstGeom prst="rect">
@@ -4846,7 +4846,7 @@
                 </a:solidFill>
                 <a:latin typeface="Calibri"/>
               </a:rPr>
-              <a:t>0.169</a:t>
+              <a:t>0.159</a:t>
             </a:r>
           </a:p>
         </p:txBody>
@@ -4888,8 +4888,8 @@
                 </a:solidFill>
                 <a:latin typeface="Calibri"/>
               </a:rPr>
-              <a:t>Emerald n=8
-same-window</a:t>
+              <a:t>IQM Garnet
+n=10</a:t>
             </a:r>
           </a:p>
         </p:txBody>
@@ -4902,8 +4902,8 @@
         </p:nvSpPr>
         <p:spPr>
           <a:xfrm>
-            <a:off x="5458968" y="3262775"/>
-            <a:ext cx="1188720" cy="1812144"/>
+            <a:off x="5458968" y="3151414"/>
+            <a:ext cx="1188720" cy="1923505"/>
           </a:xfrm>
           <a:prstGeom prst="rect">
             <a:avLst/>
@@ -4946,7 +4946,7 @@
         </p:nvSpPr>
         <p:spPr>
           <a:xfrm>
-            <a:off x="5394959" y="3079699"/>
+            <a:off x="5394959" y="2897472"/>
             <a:ext cx="1316736" cy="21945"/>
           </a:xfrm>
           <a:prstGeom prst="rect">
@@ -4990,7 +4990,7 @@
         </p:nvSpPr>
         <p:spPr>
           <a:xfrm>
-            <a:off x="5367528" y="2951879"/>
+            <a:off x="5367528" y="2840518"/>
             <a:ext cx="1371600" cy="274320"/>
           </a:xfrm>
           <a:prstGeom prst="rect">
@@ -5019,7 +5019,7 @@
                 </a:solidFill>
                 <a:latin typeface="Calibri"/>
               </a:rPr>
-              <a:t>0.179</a:t>
+              <a:t>0.190</a:t>
             </a:r>
           </a:p>
         </p:txBody>
@@ -5061,8 +5061,8 @@
                 </a:solidFill>
                 <a:latin typeface="Calibri"/>
               </a:rPr>
-              <a:t>Emerald
-n=8</a:t>
+              <a:t>IQM Garnet
+n=12</a:t>
             </a:r>
           </a:p>
         </p:txBody>
@@ -5075,8 +5075,8 @@
         </p:nvSpPr>
         <p:spPr>
           <a:xfrm>
-            <a:off x="6958584" y="3151414"/>
-            <a:ext cx="1188720" cy="1923505"/>
+            <a:off x="6958584" y="3465249"/>
+            <a:ext cx="1188720" cy="1609670"/>
           </a:xfrm>
           <a:prstGeom prst="rect">
             <a:avLst/>
@@ -5119,7 +5119,7 @@
         </p:nvSpPr>
         <p:spPr>
           <a:xfrm>
-            <a:off x="6894576" y="2897472"/>
+            <a:off x="6894576" y="3235604"/>
             <a:ext cx="1316736" cy="21945"/>
           </a:xfrm>
           <a:prstGeom prst="rect">
@@ -5163,7 +5163,7 @@
         </p:nvSpPr>
         <p:spPr>
           <a:xfrm>
-            <a:off x="6867144" y="2840518"/>
+            <a:off x="6867144" y="3154353"/>
             <a:ext cx="1371600" cy="274320"/>
           </a:xfrm>
           <a:prstGeom prst="rect">
@@ -5192,7 +5192,7 @@
                 </a:solidFill>
                 <a:latin typeface="Calibri"/>
               </a:rPr>
-              <a:t>0.190</a:t>
+              <a:t>0.159</a:t>
             </a:r>
           </a:p>
         </p:txBody>
@@ -5234,22 +5234,64 @@
                 </a:solidFill>
                 <a:latin typeface="Calibri"/>
               </a:rPr>
-              <a:t>Garnet
-n=12</a:t>
-            </a:r>
-          </a:p>
-        </p:txBody>
-      </p:sp>
-      <p:sp>
-        <p:nvSpPr>
-          <p:cNvPr id="26" name="Rectangle 25"/>
+              <a:t>Garnet n=8
+seed-1 (S7)</a:t>
+            </a:r>
+          </a:p>
+        </p:txBody>
+      </p:sp>
+      <p:sp>
+        <p:nvSpPr>
+          <p:cNvPr id="26" name="TextBox 25"/>
+          <p:cNvSpPr txBox="1"/>
+          <p:nvPr/>
+        </p:nvSpPr>
+        <p:spPr>
+          <a:xfrm>
+            <a:off x="6793992" y="5641848"/>
+            <a:ext cx="1517904" cy="274320"/>
+          </a:xfrm>
+          <a:prstGeom prst="rect">
+            <a:avLst/>
+          </a:prstGeom>
+          <a:noFill/>
+        </p:spPr>
+        <p:txBody>
+          <a:bodyPr wrap="square" anchor="t" lIns="0" rIns="0" tIns="0" bIns="0">
+            <a:spAutoFit/>
+          </a:bodyPr>
+          <a:lstStyle/>
+          <a:p>
+            <a:pPr algn="ctr">
+              <a:lnSpc>
+                <a:spcPct val="100000"/>
+              </a:lnSpc>
+              <a:spcAft>
+                <a:spcPts val="400"/>
+              </a:spcAft>
+            </a:pPr>
+            <a:r>
+              <a:rPr sz="900" b="0">
+                <a:solidFill>
+                  <a:srgbClr val="6E7A90"/>
+                </a:solidFill>
+                <a:latin typeface="Calibri"/>
+              </a:rPr>
+              <a:t>instance limit</a:t>
+            </a:r>
+          </a:p>
+        </p:txBody>
+      </p:sp>
+      <p:sp>
+        <p:nvSpPr>
+          <p:cNvPr id="27" name="Rectangle 26"/>
           <p:cNvSpPr/>
           <p:nvPr/>
         </p:nvSpPr>
         <p:spPr>
           <a:xfrm>
-            <a:off x="8458200" y="2736341"/>
-            <a:ext cx="1188720" cy="2338578"/>
+            <a:off x="8458200" y="2766713"/>
+            <a:ext cx="1188720" cy="2308206"/>
           </a:xfrm>
           <a:prstGeom prst="rect">
             <a:avLst/>
@@ -5286,7 +5328,7 @@
       </p:sp>
       <p:sp>
         <p:nvSpPr>
-          <p:cNvPr id="27" name="Rectangle 26"/>
+          <p:cNvPr id="28" name="Rectangle 27"/>
           <p:cNvSpPr/>
           <p:nvPr/>
         </p:nvSpPr>
@@ -5330,13 +5372,13 @@
       </p:sp>
       <p:sp>
         <p:nvSpPr>
-          <p:cNvPr id="28" name="TextBox 27"/>
-          <p:cNvSpPr txBox="1"/>
-          <p:nvPr/>
-        </p:nvSpPr>
-        <p:spPr>
-          <a:xfrm>
-            <a:off x="8366760" y="2425446"/>
+          <p:cNvPr id="29" name="TextBox 28"/>
+          <p:cNvSpPr txBox="1"/>
+          <p:nvPr/>
+        </p:nvSpPr>
+        <p:spPr>
+          <a:xfrm>
+            <a:off x="8366760" y="2455817"/>
             <a:ext cx="1371600" cy="274320"/>
           </a:xfrm>
           <a:prstGeom prst="rect">
@@ -5365,14 +5407,14 @@
                 </a:solidFill>
                 <a:latin typeface="Calibri"/>
               </a:rPr>
-              <a:t>0.231</a:t>
-            </a:r>
-          </a:p>
-        </p:txBody>
-      </p:sp>
-      <p:sp>
-        <p:nvSpPr>
-          <p:cNvPr id="29" name="TextBox 28"/>
+              <a:t>0.228</a:t>
+            </a:r>
+          </a:p>
+        </p:txBody>
+      </p:sp>
+      <p:sp>
+        <p:nvSpPr>
+          <p:cNvPr id="30" name="TextBox 29"/>
           <p:cNvSpPr txBox="1"/>
           <p:nvPr/>
         </p:nvSpPr>
@@ -5408,14 +5450,14 @@
                 <a:latin typeface="Calibri"/>
               </a:rPr>
               <a:t>Garnet n=8
-seed-0 (4 runs)</a:t>
-            </a:r>
-          </a:p>
-        </p:txBody>
-      </p:sp>
-      <p:sp>
-        <p:nvSpPr>
-          <p:cNvPr id="30" name="TextBox 29"/>
+seed-0</a:t>
+            </a:r>
+          </a:p>
+        </p:txBody>
+      </p:sp>
+      <p:sp>
+        <p:nvSpPr>
+          <p:cNvPr id="31" name="TextBox 30"/>
           <p:cNvSpPr txBox="1"/>
           <p:nvPr/>
         </p:nvSpPr>
@@ -5450,21 +5492,21 @@
                 </a:solidFill>
                 <a:latin typeface="Calibri"/>
               </a:rPr>
-              <a:t>0.222–0.231</a:t>
-            </a:r>
-          </a:p>
-        </p:txBody>
-      </p:sp>
-      <p:sp>
-        <p:nvSpPr>
-          <p:cNvPr id="31" name="Rectangle 30"/>
+              <a:t>4 runs 0.222–0.231</a:t>
+            </a:r>
+          </a:p>
+        </p:txBody>
+      </p:sp>
+      <p:sp>
+        <p:nvSpPr>
+          <p:cNvPr id="32" name="Rectangle 31"/>
           <p:cNvSpPr/>
           <p:nvPr/>
         </p:nvSpPr>
         <p:spPr>
           <a:xfrm>
-            <a:off x="9957816" y="2432630"/>
-            <a:ext cx="1188720" cy="2642289"/>
+            <a:off x="9957816" y="2817331"/>
+            <a:ext cx="1188720" cy="2257588"/>
           </a:xfrm>
           <a:prstGeom prst="rect">
             <a:avLst/>
@@ -5501,7 +5543,7 @@
       </p:sp>
       <p:sp>
         <p:nvSpPr>
-          <p:cNvPr id="32" name="Rectangle 31"/>
+          <p:cNvPr id="33" name="Rectangle 32"/>
           <p:cNvSpPr/>
           <p:nvPr/>
         </p:nvSpPr>
@@ -5545,13 +5587,13 @@
       </p:sp>
       <p:sp>
         <p:nvSpPr>
-          <p:cNvPr id="33" name="TextBox 32"/>
-          <p:cNvSpPr txBox="1"/>
-          <p:nvPr/>
-        </p:nvSpPr>
-        <p:spPr>
-          <a:xfrm>
-            <a:off x="9866376" y="2121734"/>
+          <p:cNvPr id="34" name="TextBox 33"/>
+          <p:cNvSpPr txBox="1"/>
+          <p:nvPr/>
+        </p:nvSpPr>
+        <p:spPr>
+          <a:xfrm>
+            <a:off x="9866376" y="2506435"/>
             <a:ext cx="1371600" cy="274320"/>
           </a:xfrm>
           <a:prstGeom prst="rect">
@@ -5580,14 +5622,14 @@
                 </a:solidFill>
                 <a:latin typeface="Calibri"/>
               </a:rPr>
-              <a:t>0.261</a:t>
-            </a:r>
-          </a:p>
-        </p:txBody>
-      </p:sp>
-      <p:sp>
-        <p:nvSpPr>
-          <p:cNvPr id="34" name="TextBox 33"/>
+              <a:t>0.223</a:t>
+            </a:r>
+          </a:p>
+        </p:txBody>
+      </p:sp>
+      <p:sp>
+        <p:nvSpPr>
+          <p:cNvPr id="35" name="TextBox 34"/>
           <p:cNvSpPr txBox="1"/>
           <p:nvPr/>
         </p:nvSpPr>
@@ -5622,15 +5664,15 @@
                 </a:solidFill>
                 <a:latin typeface="Calibri"/>
               </a:rPr>
-              <a:t>Rigetti n=8
-(2 runs)</a:t>
-            </a:r>
-          </a:p>
-        </p:txBody>
-      </p:sp>
-      <p:sp>
-        <p:nvSpPr>
-          <p:cNvPr id="35" name="TextBox 34"/>
+              <a:t>Rigetti Cep-1
+n=8</a:t>
+            </a:r>
+          </a:p>
+        </p:txBody>
+      </p:sp>
+      <p:sp>
+        <p:nvSpPr>
+          <p:cNvPr id="36" name="TextBox 35"/>
           <p:cNvSpPr txBox="1"/>
           <p:nvPr/>
         </p:nvSpPr>
@@ -5665,14 +5707,14 @@
                 </a:solidFill>
                 <a:latin typeface="Calibri"/>
               </a:rPr>
-              <a:t>0.223–0.261</a:t>
-            </a:r>
-          </a:p>
-        </p:txBody>
-      </p:sp>
-      <p:sp>
-        <p:nvSpPr>
-          <p:cNvPr id="36" name="Rectangle 35"/>
+              <a:t>4k rep; 2k was 0.261</a:t>
+            </a:r>
+          </a:p>
+        </p:txBody>
+      </p:sp>
+      <p:sp>
+        <p:nvSpPr>
+          <p:cNvPr id="37" name="Rectangle 36"/>
           <p:cNvSpPr/>
           <p:nvPr/>
         </p:nvSpPr>
@@ -5716,7 +5758,7 @@
       </p:sp>
       <p:sp>
         <p:nvSpPr>
-          <p:cNvPr id="37" name="TextBox 36"/>
+          <p:cNvPr id="38" name="TextBox 37"/>
           <p:cNvSpPr txBox="1"/>
           <p:nvPr/>
         </p:nvSpPr>
@@ -5758,7 +5800,7 @@
       </p:sp>
       <p:sp>
         <p:nvSpPr>
-          <p:cNvPr id="38" name="Rectangle 37"/>
+          <p:cNvPr id="39" name="Rectangle 38"/>
           <p:cNvSpPr/>
           <p:nvPr/>
         </p:nvSpPr>
@@ -5802,7 +5844,7 @@
       </p:sp>
       <p:sp>
         <p:nvSpPr>
-          <p:cNvPr id="39" name="TextBox 38"/>
+          <p:cNvPr id="40" name="TextBox 39"/>
           <p:cNvSpPr txBox="1"/>
           <p:nvPr/>
         </p:nvSpPr>
@@ -5844,7 +5886,7 @@
       </p:sp>
       <p:sp>
         <p:nvSpPr>
-          <p:cNvPr id="40" name="Rectangle 39"/>
+          <p:cNvPr id="41" name="Rectangle 40"/>
           <p:cNvSpPr/>
           <p:nvPr/>
         </p:nvSpPr>
@@ -5888,7 +5930,7 @@
       </p:sp>
       <p:sp>
         <p:nvSpPr>
-          <p:cNvPr id="41" name="TextBox 40"/>
+          <p:cNvPr id="42" name="TextBox 41"/>
           <p:cNvSpPr txBox="1"/>
           <p:nvPr/>
         </p:nvSpPr>
@@ -5930,7 +5972,7 @@
       </p:sp>
       <p:sp>
         <p:nvSpPr>
-          <p:cNvPr id="42" name="TextBox 41"/>
+          <p:cNvPr id="43" name="TextBox 42"/>
           <p:cNvSpPr txBox="1"/>
           <p:nvPr/>
         </p:nvSpPr>
@@ -5965,14 +6007,14 @@
                 </a:solidFill>
                 <a:latin typeface="Calibri"/>
               </a:rPr>
-              <a:t>Bars: raw feature error vs the exact simulation (4,000 shots; IonQ 500). Below the white tick, the device retains the circuit's signal; above it, the output is statistically indistinguishable from a fully scrambled state. Every verdict sits 9.7–23.9σ from its tick.</a:t>
-            </a:r>
-          </a:p>
-        </p:txBody>
-      </p:sp>
-      <p:sp>
-        <p:nvSpPr>
-          <p:cNvPr id="43" name="TextBox 42"/>
+              <a:t>Bars: raw feature error vs the exact simulation (4,000 shots; IonQ 500). Below the white tick, the device retains the circuit's signal; above it, the output is statistically indistinguishable from a fully scrambled state. Every bootstrapped verdict (9 campaigns with committed counts) sits 9.7–23.9σ from its tick.</a:t>
+            </a:r>
+          </a:p>
+        </p:txBody>
+      </p:sp>
+      <p:sp>
+        <p:nvSpPr>
+          <p:cNvPr id="44" name="TextBox 43"/>
           <p:cNvSpPr txBox="1"/>
           <p:nvPr/>
         </p:nvSpPr>
@@ -6014,7 +6056,7 @@
       </p:sp>
       <p:sp>
         <p:nvSpPr>
-          <p:cNvPr id="44" name="TextBox 43"/>
+          <p:cNvPr id="45" name="TextBox 44"/>
           <p:cNvSpPr txBox="1"/>
           <p:nvPr/>
         </p:nvSpPr>
@@ -6367,7 +6409,7 @@
                 </a:solidFill>
                 <a:latin typeface="Calibri"/>
               </a:rPr>
-              <a:t>The size effect is real — day-drift excluded by a decision rule committed before the data existed.</a:t>
+              <a:t>The effect is real for this instance — day-drift excluded by a rule committed before the data existed; S7 later localized it to the seed-0 instance, not size.</a:t>
             </a:r>
           </a:p>
         </p:txBody>
@@ -7517,7 +7559,7 @@
                 </a:solidFill>
                 <a:latin typeface="Calibri"/>
               </a:rPr>
-              <a:t>Signal-bearing execution arrived on three devices, years before our own measured baseline implied. Move from ignore to monitor.</a:t>
+              <a:t>Signal-bearing execution arrived on three devices — the pre-registered upside (S3 failing high) that we said would materially upgrade the outlook, and it did. Move from ignore to monitor.</a:t>
             </a:r>
           </a:p>
         </p:txBody>
@@ -7689,7 +7731,7 @@
                 </a:solidFill>
                 <a:latin typeface="Calibri"/>
               </a:rPr>
-              <a:t>Gate-count heuristics failed on real metal — instance and embedding dominate. Qualify hardware per workload, empirically.</a:t>
+              <a:t>Gate-count heuristics failed on real metal — instance structure dominates. Qualify hardware per workload, empirically (the embedding arm, H-EMBED, is pre-registered and unrun).</a:t>
             </a:r>
           </a:p>
         </p:txBody>
@@ -8435,7 +8477,7 @@
                 </a:solidFill>
                 <a:latin typeface="Calibri"/>
               </a:rPr>
-              <a:t>Each QPU job embeds the repo commit hash in qBraid's records: a hash-preimage proof that predictions predate data.</a:t>
+              <a:t>Each QPU job in every funded campaign embeds the repo commit hash in qBraid's records: a hash-preimage proof that predictions predate data.</a:t>
             </a:r>
           </a:p>
         </p:txBody>
@@ -8607,7 +8649,7 @@
                 </a:solidFill>
                 <a:latin typeface="Calibri"/>
               </a:rPr>
-              <a:t>≈64k credits across 10 funded campaigns, each billed exactly to estimate; organizer-grade ledger with per-job IDs.</a:t>
+              <a:t>60,698.25 org credits across 10 funded campaigns (64,048.25 incl. a disclosed personal-account anomaly), each at or under its pre-approved reservation; organizer-grade ledger with per-job IDs.</a:t>
             </a:r>
           </a:p>
         </p:txBody>
@@ -8876,7 +8918,7 @@
                 </a:solidFill>
                 <a:latin typeface="Calibri"/>
               </a:rPr>
-              <a:t>three platform-level findings responsibly disclosed to qBraid</a:t>
+              <a:t>two reproducible platform findings documented with reproduction bundles (plus one billing reconstruction, explicitly unconfirmed)</a:t>
             </a:r>
             <a:r>
               <a:rPr sz="1250" b="0">
@@ -10231,7 +10273,7 @@
                 </a:solidFill>
                 <a:latin typeface="Calibri"/>
               </a:rPr>
-              <a:t>• proof it works: our own program qualified 4 configs signal-bearing, 2 scrambled — on the SAME circuit; a ~$70 single-device test that pre-empts a six-figure wrong build</a:t>
+              <a:t>• proof it works: our own program qualified 5 configs signal-bearing, 2 scrambled — on the SAME circuit (chart, slide 3); a ~$70 single-device test that pre-empts a six-figure wrong build</a:t>
             </a:r>
           </a:p>
         </p:txBody>

--- a/docs/EIGENNEXUS_CxO_Deck.pptx
+++ b/docs/EIGENNEXUS_CxO_Deck.pptx
@@ -3540,7 +3540,7 @@
                 </a:solidFill>
                 <a:latin typeface="Calibri"/>
               </a:rPr>
-              <a:t>What we built — and what it proves</a:t>
+              <a:t>What we built — and what it shows</a:t>
             </a:r>
           </a:p>
         </p:txBody>
@@ -7689,7 +7689,7 @@
                 </a:solidFill>
                 <a:latin typeface="Calibri"/>
               </a:rPr>
-              <a:t>Spec-sheet procurement is falsified</a:t>
+              <a:t>Spec-sheet procurement is unreliable</a:t>
             </a:r>
           </a:p>
         </p:txBody>
@@ -7731,7 +7731,7 @@
                 </a:solidFill>
                 <a:latin typeface="Calibri"/>
               </a:rPr>
-              <a:t>Gate-count heuristics failed on real metal — instance structure dominates. Qualify hardware per workload, empirically (the embedding arm, H-EMBED, is pre-registered and unrun).</a:t>
+              <a:t>Gate-count heuristics mis-ranked both instances we measured on metal (n=2). Qualify hardware per workload, empirically — the mechanism is still open (H-EMBED pre-registered, unrun).</a:t>
             </a:r>
           </a:p>
         </p:txBody>
@@ -8821,7 +8821,7 @@
                 </a:solidFill>
                 <a:latin typeface="Calibri"/>
               </a:rPr>
-              <a:t>Bootstrap from committed raw counts reproduces every published number and quantifies every claim (9.7–23.9σ).</a:t>
+              <a:t>Bootstrap from committed raw counts re-derives the nine campaigns with committed counts (9.7–23.9σ).</a:t>
             </a:r>
           </a:p>
         </p:txBody>
@@ -10067,7 +10067,7 @@
                 </a:solidFill>
                 <a:latin typeface="Calibri"/>
               </a:rPr>
-              <a:t>We sell trust in a quantum yes/no — proven by an instrument that falsifies itself</a:t>
+              <a:t>We sell trust in a quantum yes/no — evidenced by an instrument that falsifies itself</a:t>
             </a:r>
           </a:p>
         </p:txBody>
@@ -10273,7 +10273,7 @@
                 </a:solidFill>
                 <a:latin typeface="Calibri"/>
               </a:rPr>
-              <a:t>• proof it works: our own program qualified 5 configs signal-bearing, 2 scrambled — on the SAME circuit (chart, slide 3); a ~$70 single-device test that pre-empts a six-figure wrong build</a:t>
+              <a:t>• proof it works: our own program qualified 5 configs signal-bearing, 2 scrambled — on the SAME circuit (chart, slide 3); a ~$70 single-device test run before you commit to a build</a:t>
             </a:r>
           </a:p>
         </p:txBody>
@@ -11067,7 +11067,7 @@
                 </a:solidFill>
                 <a:latin typeface="Calibri"/>
               </a:rPr>
-              <a:t>Every claim in this deck is committed, timestamped, and re-derivable from raw data.</a:t>
+              <a:t>Every number here is re-derivable from committed data; the pre-registered claims are additionally hash-committed in advance.</a:t>
             </a:r>
           </a:p>
         </p:txBody>
